--- a/tex/figures/fig01_psf_healpix_workflow_editable.pptx
+++ b/tex/figures/fig01_psf_healpix_workflow_editable.pptx
@@ -5578,113 +5578,6 @@
           </a:prstGeom>
         </p:spPr>
       </p:pic>
-      <p:sp>
-        <p:nvSpPr>
-          <p:cNvPr id="16" name="Rectangle 1">
-            <a:extLst>
-              <a:ext uri="{FF2B5EF4-FFF2-40B4-BE49-F238E27FC236}">
-                <a16:creationId xmlns:a16="http://schemas.microsoft.com/office/drawing/2014/main" id="{9B38ED89-0708-4810-914F-9BC6C2578297}"/>
-              </a:ext>
-            </a:extLst>
-          </p:cNvPr>
-          <p:cNvSpPr>
-            <a:spLocks noChangeArrowheads="1"/>
-          </p:cNvSpPr>
-          <p:nvPr/>
-        </p:nvSpPr>
-        <p:spPr bwMode="auto">
-          <a:xfrm>
-            <a:off x="0" y="0"/>
-            <a:ext cx="12801600" cy="457200"/>
-          </a:xfrm>
-          <a:prstGeom prst="rect">
-            <a:avLst/>
-          </a:prstGeom>
-          <a:noFill/>
-          <a:ln>
-            <a:noFill/>
-          </a:ln>
-          <a:effectLst/>
-          <a:extLst>
-            <a:ext uri="{909E8E84-426E-40DD-AFC4-6F175D3DCCD1}">
-              <a14:hiddenFill xmlns:a14="http://schemas.microsoft.com/office/drawing/2010/main">
-                <a:solidFill>
-                  <a:schemeClr val="accent1"/>
-                </a:solidFill>
-              </a14:hiddenFill>
-            </a:ext>
-            <a:ext uri="{91240B29-F687-4F45-9708-019B960494DF}">
-              <a14:hiddenLine xmlns:a14="http://schemas.microsoft.com/office/drawing/2010/main" w="9525">
-                <a:solidFill>
-                  <a:schemeClr val="tx1"/>
-                </a:solidFill>
-                <a:miter lim="800000"/>
-                <a:headEnd/>
-                <a:tailEnd/>
-              </a14:hiddenLine>
-            </a:ext>
-            <a:ext uri="{AF507438-7753-43E0-B8FC-AC1667EBCBE1}">
-              <a14:hiddenEffects xmlns:a14="http://schemas.microsoft.com/office/drawing/2010/main">
-                <a:effectLst>
-                  <a:outerShdw dist="35921" dir="2700000" algn="ctr" rotWithShape="0">
-                    <a:schemeClr val="bg2"/>
-                  </a:outerShdw>
-                </a:effectLst>
-              </a14:hiddenEffects>
-            </a:ext>
-          </a:extLst>
-        </p:spPr>
-        <p:txBody>
-          <a:bodyPr vert="horz" wrap="none" lIns="91440" tIns="45720" rIns="91440" bIns="45720" numCol="1" anchor="ctr" anchorCtr="0" compatLnSpc="1">
-            <a:prstTxWarp prst="textNoShape">
-              <a:avLst/>
-            </a:prstTxWarp>
-            <a:spAutoFit/>
-          </a:bodyPr>
-          <a:lstStyle/>
-          <a:p>
-            <a:pPr marL="0" marR="0" lvl="0" indent="0" algn="l" defTabSz="914400" rtl="0" eaLnBrk="0" fontAlgn="base" latinLnBrk="0" hangingPunct="0">
-              <a:lnSpc>
-                <a:spcPct val="100000"/>
-              </a:lnSpc>
-              <a:spcBef>
-                <a:spcPct val="0"/>
-              </a:spcBef>
-              <a:spcAft>
-                <a:spcPct val="0"/>
-              </a:spcAft>
-              <a:buClrTx/>
-              <a:buSzTx/>
-              <a:buFontTx/>
-              <a:buNone/>
-              <a:tabLst/>
-            </a:pPr>
-            <a:r>
-              <a:rPr kumimoji="0" lang="fr-FR" altLang="fr-FR" sz="1000" b="0" i="0" u="none" strike="noStrike" cap="none" normalizeH="0" baseline="0">
-                <a:ln>
-                  <a:noFill/>
-                </a:ln>
-                <a:solidFill>
-                  <a:schemeClr val="tx1"/>
-                </a:solidFill>
-                <a:effectLst/>
-                <a:latin typeface="Arial Unicode MS"/>
-              </a:rPr>
-              <a:t>D_x-weighted CG; BA never assembled</a:t>
-            </a:r>
-            <a:endParaRPr kumimoji="0" lang="fr-FR" altLang="fr-FR" sz="1800" b="0" i="0" u="none" strike="noStrike" cap="none" normalizeH="0" baseline="0">
-              <a:ln>
-                <a:noFill/>
-              </a:ln>
-              <a:solidFill>
-                <a:schemeClr val="tx1"/>
-              </a:solidFill>
-              <a:effectLst/>
-              <a:latin typeface="Arial" panose="020B0604020202020204" pitchFamily="34" charset="0"/>
-            </a:endParaRPr>
-          </a:p>
-        </p:txBody>
-      </p:sp>
     </p:spTree>
   </p:cSld>
   <p:clrMapOvr>

--- a/tex/figures/fig01_psf_healpix_workflow_editable.pptx
+++ b/tex/figures/fig01_psf_healpix_workflow_editable.pptx
@@ -2989,7 +2989,7 @@
                 <a:ea typeface="Aptos" pitchFamily="34" charset="-122"/>
                 <a:cs typeface="Arial" panose="020B0604020202020204" pitchFamily="34" charset="0"/>
               </a:rPr>
-              <a:t>10m pixels</a:t>
+              <a:t>10 m pixels</a:t>
             </a:r>
             <a:endParaRPr lang="en-US" sz="1000" dirty="0">
               <a:latin typeface="Arial" panose="020B0604020202020204" pitchFamily="34" charset="0"/>
@@ -3239,8 +3239,8 @@
         </p:nvSpPr>
         <p:spPr>
           <a:xfrm>
-            <a:off x="4353416" y="3769064"/>
-            <a:ext cx="1467390" cy="237744"/>
+            <a:off x="4275478" y="3778213"/>
+            <a:ext cx="2013928" cy="237744"/>
           </a:xfrm>
           <a:prstGeom prst="rect">
             <a:avLst/>
@@ -3266,7 +3266,7 @@
                 <a:ea typeface="Aptos" pitchFamily="34" charset="-122"/>
                 <a:cs typeface="Arial" panose="020B0604020202020204" pitchFamily="34" charset="0"/>
               </a:rPr>
-              <a:t>HEALPix cell  xⱼ</a:t>
+              <a:t>HEALPix cell-average xⱼ</a:t>
             </a:r>
             <a:endParaRPr lang="en-US" sz="1400" b="1" dirty="0">
               <a:latin typeface="Arial" panose="020B0604020202020204" pitchFamily="34" charset="0"/>
@@ -3308,7 +3308,7 @@
         </p:nvSpPr>
         <p:spPr>
           <a:xfrm>
-            <a:off x="4353416" y="4113491"/>
+            <a:off x="4275901" y="4113491"/>
             <a:ext cx="1467390" cy="237744"/>
           </a:xfrm>
           <a:prstGeom prst="rect">
@@ -3718,7 +3718,45 @@
                 <a:ea typeface="Cambria Math" panose="02040503050406030204" pitchFamily="18" charset="0"/>
                 <a:cs typeface="Aptos" pitchFamily="34" charset="-120"/>
               </a:rPr>
-              <a:t>no exact Aᵀ and Bᵀ required</a:t>
+              <a:t>D</a:t>
+            </a:r>
+            <a:r>
+              <a:rPr lang="en-US" sz="1400" baseline="-25000" dirty="0">
+                <a:solidFill>
+                  <a:srgbClr val="555555"/>
+                </a:solidFill>
+                <a:latin typeface="Cambria Math" panose="02040503050406030204" pitchFamily="18" charset="0"/>
+                <a:ea typeface="Cambria Math" panose="02040503050406030204" pitchFamily="18" charset="0"/>
+                <a:cs typeface="Aptos" pitchFamily="34" charset="-120"/>
+              </a:rPr>
+              <a:t>x</a:t>
+            </a:r>
+            <a:r>
+              <a:rPr lang="en-US" sz="1400" dirty="0">
+                <a:solidFill>
+                  <a:srgbClr val="555555"/>
+                </a:solidFill>
+                <a:latin typeface="Cambria Math" panose="02040503050406030204" pitchFamily="18" charset="0"/>
+                <a:ea typeface="Cambria Math" panose="02040503050406030204" pitchFamily="18" charset="0"/>
+                <a:cs typeface="Aptos" pitchFamily="34" charset="-120"/>
+              </a:rPr>
+              <a:t>-weighted CG; </a:t>
+            </a:r>
+          </a:p>
+          <a:p>
+            <a:pPr marL="0" indent="0" algn="ctr">
+              <a:buNone/>
+            </a:pPr>
+            <a:r>
+              <a:rPr lang="en-US" sz="1400" dirty="0">
+                <a:solidFill>
+                  <a:srgbClr val="555555"/>
+                </a:solidFill>
+                <a:latin typeface="Cambria Math" panose="02040503050406030204" pitchFamily="18" charset="0"/>
+                <a:ea typeface="Cambria Math" panose="02040503050406030204" pitchFamily="18" charset="0"/>
+                <a:cs typeface="Aptos" pitchFamily="34" charset="-120"/>
+              </a:rPr>
+              <a:t>BA never assembled</a:t>
             </a:r>
             <a:endParaRPr lang="en-US" sz="1400" dirty="0">
               <a:latin typeface="Cambria Math" panose="02040503050406030204" pitchFamily="18" charset="0"/>
@@ -4972,7 +5010,7 @@
                 <a:ea typeface="Cambria Math" panose="02040503050406030204" pitchFamily="18" charset="0"/>
                 <a:cs typeface="Arial" panose="020B0604020202020204" pitchFamily="34" charset="0"/>
               </a:rPr>
-              <a:t>Level = 20 · ≈ 6.3 m</a:t>
+              <a:t>Level = 20 · ≈ 6.2 m</a:t>
             </a:r>
             <a:endParaRPr lang="en-US" sz="1600" dirty="0">
               <a:latin typeface="Cambria Math" panose="02040503050406030204" pitchFamily="18" charset="0"/>
